--- a/MTBLS242_forecast/mtbls242_forecast_correction_th.pptx
+++ b/MTBLS242_forecast/mtbls242_forecast_correction_th.pptx
@@ -18,6 +18,9 @@
     <p:sldId id="266" r:id="rId17"/>
     <p:sldId id="267" r:id="rId18"/>
     <p:sldId id="268" r:id="rId19"/>
+    <p:sldId id="269" r:id="rId20"/>
+    <p:sldId id="270" r:id="rId21"/>
+    <p:sldId id="271" r:id="rId22"/>
   </p:sldIdLst>
   <p:sldSz cx="12191695" cy="6858000" type="screen4x3"/>
   <p:notesSz cx="6858000" cy="9144000"/>
@@ -4186,7 +4189,7 @@
                 </a:solidFill>
                 <a:latin typeface="Sukhumvit Set"/>
               </a:rPr>
-              <a:t>สิ่งที่นำไปใช้ต่อได้</a:t>
+              <a:t>ใช้ข้อมูลทุกช่วงเวลา</a:t>
             </a:r>
           </a:p>
         </p:txBody>
@@ -4225,7 +4228,7 @@
                 </a:solidFill>
                 <a:latin typeface="Sukhumvit Set"/>
               </a:rPr>
-              <a:t>ตัวควบคุมที่นำไปใช้ซ้ำได้</a:t>
+              <a:t>ใช้ trajectory ทั้งเส้น</a:t>
             </a:r>
           </a:p>
         </p:txBody>
@@ -4282,319 +4285,495 @@
         </p:nvSpPr>
         <p:spPr>
           <a:xfrm>
-            <a:off x="685800" y="1828800"/>
-            <a:ext cx="3017520" cy="365760"/>
-          </a:xfrm>
-          <a:prstGeom prst="rect">
-            <a:avLst/>
-          </a:prstGeom>
-          <a:noFill/>
-        </p:spPr>
-        <p:txBody>
-          <a:bodyPr wrap="square">
-            <a:spAutoFit/>
-          </a:bodyPr>
-          <a:lstStyle/>
-          <a:p>
-            <a:pPr algn="l">
+            <a:off x="685800" y="1691640"/>
+            <a:ext cx="10820095" cy="822960"/>
+          </a:xfrm>
+          <a:prstGeom prst="rect">
+            <a:avLst/>
+          </a:prstGeom>
+          <a:noFill/>
+        </p:spPr>
+        <p:txBody>
+          <a:bodyPr wrap="square">
+            <a:spAutoFit/>
+          </a:bodyPr>
+          <a:lstStyle/>
+          <a:p>
+            <a:pPr algn="l">
+              <a:lnSpc>
+                <a:spcPct val="130000"/>
+              </a:lnSpc>
+            </a:pPr>
+            <a:r>
+              <a:rPr sz="1350" b="0" i="0">
+                <a:solidFill>
+                  <a:srgbClr val="1A1A1A"/>
+                </a:solidFill>
+                <a:latin typeface="Sukhumvit Set"/>
+              </a:rPr>
+              <a:t>การทดลองแบบจับคู่ใช้ตัวอย่างแค่ 142 จาก 465 — ข้อมูลเดือนที่ 3, 6 และ 9 ถูกทิ้งทั้งหมด</a:t>
+            </a:r>
+          </a:p>
+          <a:p>
+            <a:pPr algn="l">
+              <a:lnSpc>
+                <a:spcPct val="130000"/>
+              </a:lnSpc>
+            </a:pPr>
+            <a:r>
+              <a:rPr sz="1350" b="0" i="0">
+                <a:solidFill>
+                  <a:srgbClr val="1A1A1A"/>
+                </a:solidFill>
+                <a:latin typeface="Sukhumvit Set"/>
+              </a:rPr>
+              <a:t>ถ้านำมาใช้ จะได้ข้อมูลเทรนเพิ่มขึ้นราว 5 เท่า</a:t>
+            </a:r>
+          </a:p>
+        </p:txBody>
+      </p:sp>
+      <p:sp>
+        <p:nvSpPr>
+          <p:cNvPr id="6" name="TextBox 5"/>
+          <p:cNvSpPr txBox="1"/>
+          <p:nvPr/>
+        </p:nvSpPr>
+        <p:spPr>
+          <a:xfrm>
+            <a:off x="685800" y="2880360"/>
+            <a:ext cx="3606698" cy="731520"/>
+          </a:xfrm>
+          <a:prstGeom prst="rect">
+            <a:avLst/>
+          </a:prstGeom>
+          <a:noFill/>
+        </p:spPr>
+        <p:txBody>
+          <a:bodyPr wrap="square">
+            <a:spAutoFit/>
+          </a:bodyPr>
+          <a:lstStyle/>
+          <a:p>
+            <a:pPr algn="ctr">
               <a:lnSpc>
                 <a:spcPct val="100000"/>
               </a:lnSpc>
             </a:pPr>
             <a:r>
-              <a:rPr sz="1450" b="1" i="0">
-                <a:solidFill>
-                  <a:srgbClr val="1F6F8B"/>
-                </a:solidFill>
-                <a:latin typeface="Sukhumvit Set"/>
-              </a:rPr>
-              <a:t>ตัวให้คะแนนแบบไม่เรียนรู้</a:t>
-            </a:r>
-          </a:p>
-        </p:txBody>
-      </p:sp>
-      <p:sp>
-        <p:nvSpPr>
-          <p:cNvPr id="6" name="TextBox 5"/>
-          <p:cNvSpPr txBox="1"/>
-          <p:nvPr/>
-        </p:nvSpPr>
-        <p:spPr>
-          <a:xfrm>
-            <a:off x="3886200" y="1828800"/>
-            <a:ext cx="7619695" cy="731520"/>
-          </a:xfrm>
-          <a:prstGeom prst="rect">
-            <a:avLst/>
-          </a:prstGeom>
-          <a:noFill/>
-        </p:spPr>
-        <p:txBody>
-          <a:bodyPr wrap="square">
-            <a:spAutoFit/>
-          </a:bodyPr>
-          <a:lstStyle/>
-          <a:p>
-            <a:pPr algn="l">
-              <a:lnSpc>
-                <a:spcPct val="125000"/>
+              <a:rPr sz="4000" b="1" i="0">
+                <a:solidFill>
+                  <a:srgbClr val="B2182B"/>
+                </a:solidFill>
+                <a:latin typeface="Sukhumvit Set"/>
+              </a:rPr>
+              <a:t>346</a:t>
+            </a:r>
+          </a:p>
+        </p:txBody>
+      </p:sp>
+      <p:sp>
+        <p:nvSpPr>
+          <p:cNvPr id="7" name="TextBox 6"/>
+          <p:cNvSpPr txBox="1"/>
+          <p:nvPr/>
+        </p:nvSpPr>
+        <p:spPr>
+          <a:xfrm>
+            <a:off x="685800" y="3593592"/>
+            <a:ext cx="3606698" cy="548640"/>
+          </a:xfrm>
+          <a:prstGeom prst="rect">
+            <a:avLst/>
+          </a:prstGeom>
+          <a:noFill/>
+        </p:spPr>
+        <p:txBody>
+          <a:bodyPr wrap="square">
+            <a:spAutoFit/>
+          </a:bodyPr>
+          <a:lstStyle/>
+          <a:p>
+            <a:pPr algn="ctr">
+              <a:lnSpc>
+                <a:spcPct val="100000"/>
+              </a:lnSpc>
+            </a:pPr>
+            <a:r>
+              <a:rPr sz="1100" b="0" i="0">
+                <a:solidFill>
+                  <a:srgbClr val="666666"/>
+                </a:solidFill>
+                <a:latin typeface="Sukhumvit Set"/>
+              </a:rPr>
+              <a:t>transition ที่ต่อเนื่องกัน</a:t>
+            </a:r>
+          </a:p>
+          <a:p>
+            <a:pPr algn="ctr">
+              <a:lnSpc>
+                <a:spcPct val="100000"/>
+              </a:lnSpc>
+            </a:pPr>
+            <a:r>
+              <a:rPr sz="1100" b="0" i="0">
+                <a:solidFill>
+                  <a:srgbClr val="666666"/>
+                </a:solidFill>
+                <a:latin typeface="Sukhumvit Set"/>
+              </a:rPr>
+              <a:t>(เทียบกับ 71 คู่)</a:t>
+            </a:r>
+          </a:p>
+        </p:txBody>
+      </p:sp>
+      <p:sp>
+        <p:nvSpPr>
+          <p:cNvPr id="8" name="TextBox 7"/>
+          <p:cNvSpPr txBox="1"/>
+          <p:nvPr/>
+        </p:nvSpPr>
+        <p:spPr>
+          <a:xfrm>
+            <a:off x="4292498" y="2880360"/>
+            <a:ext cx="3606698" cy="731520"/>
+          </a:xfrm>
+          <a:prstGeom prst="rect">
+            <a:avLst/>
+          </a:prstGeom>
+          <a:noFill/>
+        </p:spPr>
+        <p:txBody>
+          <a:bodyPr wrap="square">
+            <a:spAutoFit/>
+          </a:bodyPr>
+          <a:lstStyle/>
+          <a:p>
+            <a:pPr algn="ctr">
+              <a:lnSpc>
+                <a:spcPct val="100000"/>
+              </a:lnSpc>
+            </a:pPr>
+            <a:r>
+              <a:rPr sz="4000" b="1" i="0">
+                <a:solidFill>
+                  <a:srgbClr val="1A1A1A"/>
+                </a:solidFill>
+                <a:latin typeface="Sukhumvit Set"/>
+              </a:rPr>
+              <a:t>465</a:t>
+            </a:r>
+          </a:p>
+        </p:txBody>
+      </p:sp>
+      <p:sp>
+        <p:nvSpPr>
+          <p:cNvPr id="9" name="TextBox 8"/>
+          <p:cNvSpPr txBox="1"/>
+          <p:nvPr/>
+        </p:nvSpPr>
+        <p:spPr>
+          <a:xfrm>
+            <a:off x="4292498" y="3593592"/>
+            <a:ext cx="3606698" cy="548640"/>
+          </a:xfrm>
+          <a:prstGeom prst="rect">
+            <a:avLst/>
+          </a:prstGeom>
+          <a:noFill/>
+        </p:spPr>
+        <p:txBody>
+          <a:bodyPr wrap="square">
+            <a:spAutoFit/>
+          </a:bodyPr>
+          <a:lstStyle/>
+          <a:p>
+            <a:pPr algn="ctr">
+              <a:lnSpc>
+                <a:spcPct val="100000"/>
+              </a:lnSpc>
+            </a:pPr>
+            <a:r>
+              <a:rPr sz="1100" b="0" i="0">
+                <a:solidFill>
+                  <a:srgbClr val="666666"/>
+                </a:solidFill>
+                <a:latin typeface="Sukhumvit Set"/>
+              </a:rPr>
+              <a:t>ตัวอย่างที่ใช้จริง</a:t>
+            </a:r>
+          </a:p>
+          <a:p>
+            <a:pPr algn="ctr">
+              <a:lnSpc>
+                <a:spcPct val="100000"/>
+              </a:lnSpc>
+            </a:pPr>
+            <a:r>
+              <a:rPr sz="1100" b="0" i="0">
+                <a:solidFill>
+                  <a:srgbClr val="666666"/>
+                </a:solidFill>
+                <a:latin typeface="Sukhumvit Set"/>
+              </a:rPr>
+              <a:t>(เทียบกับ 142)</a:t>
+            </a:r>
+          </a:p>
+        </p:txBody>
+      </p:sp>
+      <p:sp>
+        <p:nvSpPr>
+          <p:cNvPr id="10" name="TextBox 9"/>
+          <p:cNvSpPr txBox="1"/>
+          <p:nvPr/>
+        </p:nvSpPr>
+        <p:spPr>
+          <a:xfrm>
+            <a:off x="7899196" y="2880360"/>
+            <a:ext cx="3606698" cy="731520"/>
+          </a:xfrm>
+          <a:prstGeom prst="rect">
+            <a:avLst/>
+          </a:prstGeom>
+          <a:noFill/>
+        </p:spPr>
+        <p:txBody>
+          <a:bodyPr wrap="square">
+            <a:spAutoFit/>
+          </a:bodyPr>
+          <a:lstStyle/>
+          <a:p>
+            <a:pPr algn="ctr">
+              <a:lnSpc>
+                <a:spcPct val="100000"/>
+              </a:lnSpc>
+            </a:pPr>
+            <a:r>
+              <a:rPr sz="4000" b="1" i="0">
+                <a:solidFill>
+                  <a:srgbClr val="1A1A1A"/>
+                </a:solidFill>
+                <a:latin typeface="Sukhumvit Set"/>
+              </a:rPr>
+              <a:t>60</a:t>
+            </a:r>
+          </a:p>
+        </p:txBody>
+      </p:sp>
+      <p:sp>
+        <p:nvSpPr>
+          <p:cNvPr id="11" name="TextBox 10"/>
+          <p:cNvSpPr txBox="1"/>
+          <p:nvPr/>
+        </p:nvSpPr>
+        <p:spPr>
+          <a:xfrm>
+            <a:off x="7899196" y="3593592"/>
+            <a:ext cx="3606698" cy="548640"/>
+          </a:xfrm>
+          <a:prstGeom prst="rect">
+            <a:avLst/>
+          </a:prstGeom>
+          <a:noFill/>
+        </p:spPr>
+        <p:txBody>
+          <a:bodyPr wrap="square">
+            <a:spAutoFit/>
+          </a:bodyPr>
+          <a:lstStyle/>
+          <a:p>
+            <a:pPr algn="ctr">
+              <a:lnSpc>
+                <a:spcPct val="100000"/>
+              </a:lnSpc>
+            </a:pPr>
+            <a:r>
+              <a:rPr sz="1100" b="0" i="0">
+                <a:solidFill>
+                  <a:srgbClr val="666666"/>
+                </a:solidFill>
+                <a:latin typeface="Sukhumvit Set"/>
+              </a:rPr>
+              <a:t>ผู้ป่วยที่มี trajectory</a:t>
+            </a:r>
+          </a:p>
+          <a:p>
+            <a:pPr algn="ctr">
+              <a:lnSpc>
+                <a:spcPct val="100000"/>
+              </a:lnSpc>
+            </a:pPr>
+            <a:r>
+              <a:rPr sz="1100" b="0" i="0">
+                <a:solidFill>
+                  <a:srgbClr val="666666"/>
+                </a:solidFill>
+                <a:latin typeface="Sukhumvit Set"/>
+              </a:rPr>
+              <a:t>ครบทั้ง 5 จุด</a:t>
+            </a:r>
+          </a:p>
+        </p:txBody>
+      </p:sp>
+      <p:sp>
+        <p:nvSpPr>
+          <p:cNvPr id="12" name="TextBox 11"/>
+          <p:cNvSpPr txBox="1"/>
+          <p:nvPr/>
+        </p:nvSpPr>
+        <p:spPr>
+          <a:xfrm>
+            <a:off x="685800" y="4846320"/>
+            <a:ext cx="10820095" cy="1188720"/>
+          </a:xfrm>
+          <a:prstGeom prst="rect">
+            <a:avLst/>
+          </a:prstGeom>
+          <a:noFill/>
+        </p:spPr>
+        <p:txBody>
+          <a:bodyPr wrap="square">
+            <a:spAutoFit/>
+          </a:bodyPr>
+          <a:lstStyle/>
+          <a:p>
+            <a:pPr algn="l">
+              <a:lnSpc>
+                <a:spcPct val="130000"/>
               </a:lnSpc>
             </a:pPr>
             <a:r>
               <a:rPr sz="1200" b="0" i="0">
                 <a:solidFill>
+                  <a:srgbClr val="666666"/>
+                </a:solidFill>
+                <a:latin typeface="Sukhumvit Set"/>
+              </a:rPr>
+              <a:t>ใช้ subject-grouped 5-fold CV — ผู้ป่วย 1 คนให้ transition ได้ถึง 4 อัน ถ้าแบ่ง fold แบบสุ่มรายแถว</a:t>
+            </a:r>
+          </a:p>
+          <a:p>
+            <a:pPr algn="l">
+              <a:lnSpc>
+                <a:spcPct val="130000"/>
+              </a:lnSpc>
+            </a:pPr>
+            <a:r>
+              <a:rPr sz="1200" b="0" i="0">
+                <a:solidFill>
+                  <a:srgbClr val="666666"/>
+                </a:solidFill>
+                <a:latin typeface="Sukhumvit Set"/>
+              </a:rPr>
+              <a:t>คนเดียวกันจะไปอยู่ทั้ง train และ test และในช่วงห่าง 3 เดือน baseline ที่ต้องเอาชนะคือ persistence ไม่ใช่ค่าเฉลี่ยของ cohort</a:t>
+            </a:r>
+          </a:p>
+        </p:txBody>
+      </p:sp>
+    </p:spTree>
+  </p:cSld>
+  <p:clrMapOvr>
+    <a:masterClrMapping/>
+  </p:clrMapOvr>
+</p:sld>
+</file>
+
+<file path=ppt/slides/slide13.xml><?xml version="1.0" encoding="utf-8"?>
+<p:sld xmlns:a="http://schemas.openxmlformats.org/drawingml/2006/main" xmlns:p="http://schemas.openxmlformats.org/presentationml/2006/main" xmlns:r="http://schemas.openxmlformats.org/officeDocument/2006/relationships">
+  <p:cSld>
+    <p:spTree>
+      <p:nvGrpSpPr>
+        <p:cNvPr id="1" name=""/>
+        <p:cNvGrpSpPr/>
+        <p:nvPr/>
+      </p:nvGrpSpPr>
+      <p:grpSpPr/>
+      <p:sp>
+        <p:nvSpPr>
+          <p:cNvPr id="2" name="TextBox 1"/>
+          <p:cNvSpPr txBox="1"/>
+          <p:nvPr/>
+        </p:nvSpPr>
+        <p:spPr>
+          <a:xfrm>
+            <a:off x="685800" y="384048"/>
+            <a:ext cx="10820095" cy="274320"/>
+          </a:xfrm>
+          <a:prstGeom prst="rect">
+            <a:avLst/>
+          </a:prstGeom>
+          <a:noFill/>
+        </p:spPr>
+        <p:txBody>
+          <a:bodyPr wrap="square">
+            <a:spAutoFit/>
+          </a:bodyPr>
+          <a:lstStyle/>
+          <a:p>
+            <a:pPr algn="l">
+              <a:lnSpc>
+                <a:spcPct val="100000"/>
+              </a:lnSpc>
+            </a:pPr>
+            <a:r>
+              <a:rPr sz="1100" b="1" i="0">
+                <a:solidFill>
+                  <a:srgbClr val="666666"/>
+                </a:solidFill>
+                <a:latin typeface="Sukhumvit Set"/>
+              </a:rPr>
+              <a:t>ใช้ข้อมูลทุกช่วงเวลา</a:t>
+            </a:r>
+          </a:p>
+        </p:txBody>
+      </p:sp>
+      <p:sp>
+        <p:nvSpPr>
+          <p:cNvPr id="3" name="TextBox 2"/>
+          <p:cNvSpPr txBox="1"/>
+          <p:nvPr/>
+        </p:nvSpPr>
+        <p:spPr>
+          <a:xfrm>
+            <a:off x="685800" y="658368"/>
+            <a:ext cx="10820095" cy="822960"/>
+          </a:xfrm>
+          <a:prstGeom prst="rect">
+            <a:avLst/>
+          </a:prstGeom>
+          <a:noFill/>
+        </p:spPr>
+        <p:txBody>
+          <a:bodyPr wrap="square">
+            <a:spAutoFit/>
+          </a:bodyPr>
+          <a:lstStyle/>
+          <a:p>
+            <a:pPr algn="l">
+              <a:lnSpc>
+                <a:spcPct val="100000"/>
+              </a:lnSpc>
+            </a:pPr>
+            <a:r>
+              <a:rPr sz="2700" b="1" i="0">
+                <a:solidFill>
                   <a:srgbClr val="1A1A1A"/>
                 </a:solidFill>
                 <a:latin typeface="Sukhumvit Set"/>
               </a:rPr>
-              <a:t>ผลรวมของ z-score ค่าตั้งต้นแบบใส่เครื่องหมาย ใช้จับโมเดลที่ยังไม่ลู่เข้า หรือที่ไม่ได้เรียนรู้อะไรเกินกว่าที่ input บอกอยู่แล้ว โมเดลทุกตัวต้องรายงานคู่กับค่านี้เสมอ</a:t>
-            </a:r>
-          </a:p>
-        </p:txBody>
-      </p:sp>
-      <p:sp>
-        <p:nvSpPr>
-          <p:cNvPr id="7" name="TextBox 6"/>
-          <p:cNvSpPr txBox="1"/>
-          <p:nvPr/>
-        </p:nvSpPr>
-        <p:spPr>
-          <a:xfrm>
-            <a:off x="685800" y="2834640"/>
-            <a:ext cx="3017520" cy="365760"/>
-          </a:xfrm>
-          <a:prstGeom prst="rect">
-            <a:avLst/>
-          </a:prstGeom>
-          <a:noFill/>
-        </p:spPr>
-        <p:txBody>
-          <a:bodyPr wrap="square">
-            <a:spAutoFit/>
-          </a:bodyPr>
-          <a:lstStyle/>
-          <a:p>
-            <a:pPr algn="l">
-              <a:lnSpc>
-                <a:spcPct val="100000"/>
-              </a:lnSpc>
-            </a:pPr>
-            <a:r>
-              <a:rPr sz="1450" b="1" i="0">
-                <a:solidFill>
-                  <a:srgbClr val="1F6F8B"/>
-                </a:solidFill>
-                <a:latin typeface="Sukhumvit Set"/>
-              </a:rPr>
-              <a:t>null แบบทำลายการจับคู่</a:t>
-            </a:r>
-          </a:p>
-        </p:txBody>
-      </p:sp>
-      <p:sp>
-        <p:nvSpPr>
-          <p:cNvPr id="8" name="TextBox 7"/>
-          <p:cNvSpPr txBox="1"/>
-          <p:nvPr/>
-        </p:nvSpPr>
-        <p:spPr>
-          <a:xfrm>
-            <a:off x="3886200" y="2834640"/>
-            <a:ext cx="7619695" cy="731520"/>
-          </a:xfrm>
-          <a:prstGeom prst="rect">
-            <a:avLst/>
-          </a:prstGeom>
-          <a:noFill/>
-        </p:spPr>
-        <p:txBody>
-          <a:bodyPr wrap="square">
-            <a:spAutoFit/>
-          </a:bodyPr>
-          <a:lstStyle/>
-          <a:p>
-            <a:pPr algn="l">
-              <a:lnSpc>
-                <a:spcPct val="125000"/>
-              </a:lnSpc>
-            </a:pPr>
-            <a:r>
-              <a:rPr sz="1200" b="0" i="0">
-                <a:solidFill>
-                  <a:srgbClr val="1A1A1A"/>
-                </a:solidFill>
-                <a:latin typeface="Sukhumvit Set"/>
-              </a:rPr>
-              <a:t>สลับว่าอนาคตของใครเป็นของผู้ป่วยคนไหน แล้วสร้าง outcome ขึ้นใหม่ ใช้จับ outcome ที่ถูกสร้างขึ้นมาจาก feature เอง ตัวนี้คือตัวที่ชี้ขาด</a:t>
-            </a:r>
-          </a:p>
-        </p:txBody>
-      </p:sp>
-      <p:sp>
-        <p:nvSpPr>
-          <p:cNvPr id="9" name="TextBox 8"/>
-          <p:cNvSpPr txBox="1"/>
-          <p:nvPr/>
-        </p:nvSpPr>
-        <p:spPr>
-          <a:xfrm>
-            <a:off x="685800" y="3840480"/>
-            <a:ext cx="3017520" cy="365760"/>
-          </a:xfrm>
-          <a:prstGeom prst="rect">
-            <a:avLst/>
-          </a:prstGeom>
-          <a:noFill/>
-        </p:spPr>
-        <p:txBody>
-          <a:bodyPr wrap="square">
-            <a:spAutoFit/>
-          </a:bodyPr>
-          <a:lstStyle/>
-          <a:p>
-            <a:pPr algn="l">
-              <a:lnSpc>
-                <a:spcPct val="100000"/>
-              </a:lnSpc>
-            </a:pPr>
-            <a:r>
-              <a:rPr sz="1450" b="1" i="0">
-                <a:solidFill>
-                  <a:srgbClr val="1F6F8B"/>
-                </a:solidFill>
-                <a:latin typeface="Sukhumvit Set"/>
-              </a:rPr>
-              <a:t>การทดสอบ label-permutation</a:t>
-            </a:r>
-          </a:p>
-        </p:txBody>
-      </p:sp>
-      <p:sp>
-        <p:nvSpPr>
-          <p:cNvPr id="10" name="TextBox 9"/>
-          <p:cNvSpPr txBox="1"/>
-          <p:nvPr/>
-        </p:nvSpPr>
-        <p:spPr>
-          <a:xfrm>
-            <a:off x="3886200" y="3840480"/>
-            <a:ext cx="7619695" cy="731520"/>
-          </a:xfrm>
-          <a:prstGeom prst="rect">
-            <a:avLst/>
-          </a:prstGeom>
-          <a:noFill/>
-        </p:spPr>
-        <p:txBody>
-          <a:bodyPr wrap="square">
-            <a:spAutoFit/>
-          </a:bodyPr>
-          <a:lstStyle/>
-          <a:p>
-            <a:pPr algn="l">
-              <a:lnSpc>
-                <a:spcPct val="125000"/>
-              </a:lnSpc>
-            </a:pPr>
-            <a:r>
-              <a:rPr sz="1200" b="0" i="0">
-                <a:solidFill>
-                  <a:srgbClr val="1A1A1A"/>
-                </a:solidFill>
-                <a:latin typeface="Sukhumvit Set"/>
-              </a:rPr>
-              <a:t>จำเป็น แต่พิสูจน์แล้วว่าไม่เพียงพอ — ให้ค่า p = 0.002 กับการตั้งโจทย์ที่ผิด</a:t>
-            </a:r>
-          </a:p>
-        </p:txBody>
-      </p:sp>
-      <p:sp>
-        <p:nvSpPr>
-          <p:cNvPr id="11" name="TextBox 10"/>
-          <p:cNvSpPr txBox="1"/>
-          <p:nvPr/>
-        </p:nvSpPr>
-        <p:spPr>
-          <a:xfrm>
-            <a:off x="685800" y="4846320"/>
-            <a:ext cx="3017520" cy="365760"/>
-          </a:xfrm>
-          <a:prstGeom prst="rect">
-            <a:avLst/>
-          </a:prstGeom>
-          <a:noFill/>
-        </p:spPr>
-        <p:txBody>
-          <a:bodyPr wrap="square">
-            <a:spAutoFit/>
-          </a:bodyPr>
-          <a:lstStyle/>
-          <a:p>
-            <a:pPr algn="l">
-              <a:lnSpc>
-                <a:spcPct val="100000"/>
-              </a:lnSpc>
-            </a:pPr>
-            <a:r>
-              <a:rPr sz="1450" b="1" i="0">
-                <a:solidFill>
-                  <a:srgbClr val="1F6F8B"/>
-                </a:solidFill>
-                <a:latin typeface="Sukhumvit Set"/>
-              </a:rPr>
-              <a:t>ช่วงความเชื่อมั่นแบบ paired bootstrap</a:t>
-            </a:r>
-          </a:p>
-        </p:txBody>
-      </p:sp>
-      <p:sp>
-        <p:nvSpPr>
-          <p:cNvPr id="12" name="TextBox 11"/>
-          <p:cNvSpPr txBox="1"/>
-          <p:nvPr/>
-        </p:nvSpPr>
-        <p:spPr>
-          <a:xfrm>
-            <a:off x="3886200" y="4846320"/>
-            <a:ext cx="7619695" cy="731520"/>
-          </a:xfrm>
-          <a:prstGeom prst="rect">
-            <a:avLst/>
-          </a:prstGeom>
-          <a:noFill/>
-        </p:spPr>
-        <p:txBody>
-          <a:bodyPr wrap="square">
-            <a:spAutoFit/>
-          </a:bodyPr>
-          <a:lstStyle/>
-          <a:p>
-            <a:pPr algn="l">
-              <a:lnSpc>
-                <a:spcPct val="125000"/>
-              </a:lnSpc>
-            </a:pPr>
-            <a:r>
-              <a:rPr sz="1200" b="0" i="0">
-                <a:solidFill>
-                  <a:srgbClr val="1A1A1A"/>
-                </a:solidFill>
-                <a:latin typeface="Sukhumvit Set"/>
-              </a:rPr>
-              <a:t>ใช้กับทุกส่วนต่างระหว่างโมเดลกับ baseline โดยสุ่มผู้ป่วยพร้อมกันเป็นคู่ ส่วนต่าง 2.4% ที่ไม่มีช่วงความเชื่อมั่นกำกับ ยังไม่นับเป็นผลลัพธ์</a:t>
-            </a:r>
-          </a:p>
-        </p:txBody>
-      </p:sp>
-      <p:sp>
-        <p:nvSpPr>
-          <p:cNvPr id="13" name="Rectangle 12"/>
+              <a:t>ข้อมูลเพิ่ม 5 เท่า แต่ข้อสรุปเหมือนเดิม</a:t>
+            </a:r>
+          </a:p>
+        </p:txBody>
+      </p:sp>
+      <p:sp>
+        <p:nvSpPr>
+          <p:cNvPr id="4" name="Rectangle 3"/>
           <p:cNvSpPr/>
           <p:nvPr/>
         </p:nvSpPr>
         <p:spPr>
           <a:xfrm>
-            <a:off x="685800" y="5943600"/>
+            <a:off x="685800" y="1481328"/>
             <a:ext cx="10820095" cy="9525"/>
           </a:xfrm>
           <a:prstGeom prst="rect">
@@ -4630,15 +4809,133 @@
           </a:p>
         </p:txBody>
       </p:sp>
-      <p:sp>
-        <p:nvSpPr>
-          <p:cNvPr id="14" name="TextBox 13"/>
-          <p:cNvSpPr txBox="1"/>
-          <p:nvPr/>
-        </p:nvSpPr>
-        <p:spPr>
-          <a:xfrm>
-            <a:off x="685800" y="6126480"/>
+      <p:pic>
+        <p:nvPicPr>
+          <p:cNvPr id="5" name="Picture 4" descr="autoregressive.png"/>
+          <p:cNvPicPr>
+            <a:picLocks noChangeAspect="1"/>
+          </p:cNvPicPr>
+          <p:nvPr/>
+        </p:nvPicPr>
+        <p:blipFill>
+          <a:blip r:embed="rId2"/>
+          <a:stretch>
+            <a:fillRect/>
+          </a:stretch>
+        </p:blipFill>
+        <p:spPr>
+          <a:xfrm>
+            <a:off x="2916699" y="1691640"/>
+            <a:ext cx="6358296" cy="2880360"/>
+          </a:xfrm>
+          <a:prstGeom prst="rect">
+            <a:avLst/>
+          </a:prstGeom>
+        </p:spPr>
+      </p:pic>
+      <p:sp>
+        <p:nvSpPr>
+          <p:cNvPr id="6" name="TextBox 5"/>
+          <p:cNvSpPr txBox="1"/>
+          <p:nvPr/>
+        </p:nvSpPr>
+        <p:spPr>
+          <a:xfrm>
+            <a:off x="685800" y="4800600"/>
+            <a:ext cx="10820095" cy="731520"/>
+          </a:xfrm>
+          <a:prstGeom prst="rect">
+            <a:avLst/>
+          </a:prstGeom>
+          <a:noFill/>
+        </p:spPr>
+        <p:txBody>
+          <a:bodyPr wrap="square">
+            <a:spAutoFit/>
+          </a:bodyPr>
+          <a:lstStyle/>
+          <a:p>
+            <a:pPr algn="l">
+              <a:lnSpc>
+                <a:spcPct val="130000"/>
+              </a:lnSpc>
+            </a:pPr>
+            <a:r>
+              <a:rPr sz="1600" b="1" i="0">
+                <a:solidFill>
+                  <a:srgbClr val="B2182B"/>
+                </a:solidFill>
+                <a:latin typeface="Sukhumvit Set"/>
+              </a:rPr>
+              <a:t>การรู้โปรไฟล์ของผู้ป่วยคนนั้นเองที่เวลา t ไม่ได้ดีไปกว่า</a:t>
+            </a:r>
+          </a:p>
+          <a:p>
+            <a:pPr algn="l">
+              <a:lnSpc>
+                <a:spcPct val="130000"/>
+              </a:lnSpc>
+            </a:pPr>
+            <a:r>
+              <a:rPr sz="1600" b="1" i="0">
+                <a:solidFill>
+                  <a:srgbClr val="B2182B"/>
+                </a:solidFill>
+                <a:latin typeface="Sukhumvit Set"/>
+              </a:rPr>
+              <a:t>การรู้แค่ว่า cohort โดยรวมหน้าตาเป็นอย่างไรที่เวลา t+1</a:t>
+            </a:r>
+          </a:p>
+        </p:txBody>
+      </p:sp>
+      <p:sp>
+        <p:nvSpPr>
+          <p:cNvPr id="7" name="TextBox 6"/>
+          <p:cNvSpPr txBox="1"/>
+          <p:nvPr/>
+        </p:nvSpPr>
+        <p:spPr>
+          <a:xfrm>
+            <a:off x="685800" y="5623560"/>
+            <a:ext cx="10820095" cy="320040"/>
+          </a:xfrm>
+          <a:prstGeom prst="rect">
+            <a:avLst/>
+          </a:prstGeom>
+          <a:noFill/>
+        </p:spPr>
+        <p:txBody>
+          <a:bodyPr wrap="square">
+            <a:spAutoFit/>
+          </a:bodyPr>
+          <a:lstStyle/>
+          <a:p>
+            <a:pPr algn="l">
+              <a:lnSpc>
+                <a:spcPct val="100000"/>
+              </a:lnSpc>
+            </a:pPr>
+            <a:r>
+              <a:rPr sz="1300" b="1" i="0">
+                <a:solidFill>
+                  <a:srgbClr val="1A1A1A"/>
+                </a:solidFill>
+                <a:latin typeface="Sukhumvit Set"/>
+              </a:rPr>
+              <a:t>ช่วง 6→9 เดือน คือช่วงเดียวที่ข้อมูลรายบุคคลมีความหมาย</a:t>
+            </a:r>
+          </a:p>
+        </p:txBody>
+      </p:sp>
+      <p:sp>
+        <p:nvSpPr>
+          <p:cNvPr id="8" name="TextBox 7"/>
+          <p:cNvSpPr txBox="1"/>
+          <p:nvPr/>
+        </p:nvSpPr>
+        <p:spPr>
+          <a:xfrm>
+            <a:off x="685800" y="5952744"/>
             <a:ext cx="10820095" cy="457200"/>
           </a:xfrm>
           <a:prstGeom prst="rect">
@@ -4654,17 +4951,17 @@
           <a:p>
             <a:pPr algn="l">
               <a:lnSpc>
-                <a:spcPct val="100000"/>
-              </a:lnSpc>
-            </a:pPr>
-            <a:r>
-              <a:rPr sz="1250" b="1" i="0">
-                <a:solidFill>
-                  <a:srgbClr val="1A1A1A"/>
-                </a:solidFill>
-                <a:latin typeface="Sukhumvit Set"/>
-              </a:rPr>
-              <a:t>ควรใช้ null แบบทำลายการจับคู่ กับงานวิเคราะห์ข้อมูลระยะยาวทุกชิ้นที่ outcome เป็นค่าผลต่าง และค่าตั้งต้นก็เป็น feature ด้วย</a:t>
+                <a:spcPct val="125000"/>
+              </a:lnSpc>
+            </a:pPr>
+            <a:r>
+              <a:rPr sz="1150" b="0" i="0">
+                <a:solidFill>
+                  <a:srgbClr val="666666"/>
+                </a:solidFill>
+                <a:latin typeface="Sukhumvit Set"/>
+              </a:rPr>
+              <a:t>เป็น transition เดียวที่โมเดลชนะทั้ง persistence และค่าเฉลี่ย — n=90 เป็นแค่ 1 ใน 4 ช่วง และยังไม่ได้แก้ค่าจากการทดสอบหลายครั้ง</a:t>
             </a:r>
           </a:p>
         </p:txBody>
@@ -4677,7 +4974,1090 @@
 </p:sld>
 </file>
 
-<file path=ppt/slides/slide13.xml><?xml version="1.0" encoding="utf-8"?>
+<file path=ppt/slides/slide14.xml><?xml version="1.0" encoding="utf-8"?>
+<p:sld xmlns:a="http://schemas.openxmlformats.org/drawingml/2006/main" xmlns:p="http://schemas.openxmlformats.org/presentationml/2006/main" xmlns:r="http://schemas.openxmlformats.org/officeDocument/2006/relationships">
+  <p:cSld>
+    <p:spTree>
+      <p:nvGrpSpPr>
+        <p:cNvPr id="1" name=""/>
+        <p:cNvGrpSpPr/>
+        <p:nvPr/>
+      </p:nvGrpSpPr>
+      <p:grpSpPr/>
+      <p:sp>
+        <p:nvSpPr>
+          <p:cNvPr id="2" name="TextBox 1"/>
+          <p:cNvSpPr txBox="1"/>
+          <p:nvPr/>
+        </p:nvSpPr>
+        <p:spPr>
+          <a:xfrm>
+            <a:off x="685800" y="384048"/>
+            <a:ext cx="10820095" cy="274320"/>
+          </a:xfrm>
+          <a:prstGeom prst="rect">
+            <a:avLst/>
+          </a:prstGeom>
+          <a:noFill/>
+        </p:spPr>
+        <p:txBody>
+          <a:bodyPr wrap="square">
+            <a:spAutoFit/>
+          </a:bodyPr>
+          <a:lstStyle/>
+          <a:p>
+            <a:pPr algn="l">
+              <a:lnSpc>
+                <a:spcPct val="100000"/>
+              </a:lnSpc>
+            </a:pPr>
+            <a:r>
+              <a:rPr sz="1100" b="1" i="0">
+                <a:solidFill>
+                  <a:srgbClr val="666666"/>
+                </a:solidFill>
+                <a:latin typeface="Sukhumvit Set"/>
+              </a:rPr>
+              <a:t>ใช้ข้อมูลทุกช่วงเวลา</a:t>
+            </a:r>
+          </a:p>
+        </p:txBody>
+      </p:sp>
+      <p:sp>
+        <p:nvSpPr>
+          <p:cNvPr id="3" name="TextBox 2"/>
+          <p:cNvSpPr txBox="1"/>
+          <p:nvPr/>
+        </p:nvSpPr>
+        <p:spPr>
+          <a:xfrm>
+            <a:off x="685800" y="658368"/>
+            <a:ext cx="10820095" cy="822960"/>
+          </a:xfrm>
+          <a:prstGeom prst="rect">
+            <a:avLst/>
+          </a:prstGeom>
+          <a:noFill/>
+        </p:spPr>
+        <p:txBody>
+          <a:bodyPr wrap="square">
+            <a:spAutoFit/>
+          </a:bodyPr>
+          <a:lstStyle/>
+          <a:p>
+            <a:pPr algn="l">
+              <a:lnSpc>
+                <a:spcPct val="100000"/>
+              </a:lnSpc>
+            </a:pPr>
+            <a:r>
+              <a:rPr sz="2700" b="1" i="0">
+                <a:solidFill>
+                  <a:srgbClr val="1A1A1A"/>
+                </a:solidFill>
+                <a:latin typeface="Sukhumvit Set"/>
+              </a:rPr>
+              <a:t>Iterated เทียบกับ direct — เดินตาม trajectory แพ้</a:t>
+            </a:r>
+          </a:p>
+        </p:txBody>
+      </p:sp>
+      <p:sp>
+        <p:nvSpPr>
+          <p:cNvPr id="4" name="Rectangle 3"/>
+          <p:cNvSpPr/>
+          <p:nvPr/>
+        </p:nvSpPr>
+        <p:spPr>
+          <a:xfrm>
+            <a:off x="685800" y="1481328"/>
+            <a:ext cx="10820095" cy="9525"/>
+          </a:xfrm>
+          <a:prstGeom prst="rect">
+            <a:avLst/>
+          </a:prstGeom>
+          <a:solidFill>
+            <a:srgbClr val="DDDDDD"/>
+          </a:solidFill>
+          <a:ln>
+            <a:noFill/>
+          </a:ln>
+          <a:effectLst/>
+        </p:spPr>
+        <p:style>
+          <a:lnRef idx="1">
+            <a:schemeClr val="accent1"/>
+          </a:lnRef>
+          <a:fillRef idx="3">
+            <a:schemeClr val="accent1"/>
+          </a:fillRef>
+          <a:effectRef idx="2">
+            <a:schemeClr val="accent1"/>
+          </a:effectRef>
+          <a:fontRef idx="minor">
+            <a:schemeClr val="lt1"/>
+          </a:fontRef>
+        </p:style>
+        <p:txBody>
+          <a:bodyPr rtlCol="0" anchor="ctr"/>
+          <a:lstStyle/>
+          <a:p>
+            <a:pPr algn="ctr"/>
+          </a:p>
+        </p:txBody>
+      </p:sp>
+      <p:sp>
+        <p:nvSpPr>
+          <p:cNvPr id="5" name="TextBox 4"/>
+          <p:cNvSpPr txBox="1"/>
+          <p:nvPr/>
+        </p:nvSpPr>
+        <p:spPr>
+          <a:xfrm>
+            <a:off x="685800" y="1737360"/>
+            <a:ext cx="10820095" cy="731520"/>
+          </a:xfrm>
+          <a:prstGeom prst="rect">
+            <a:avLst/>
+          </a:prstGeom>
+          <a:noFill/>
+        </p:spPr>
+        <p:txBody>
+          <a:bodyPr wrap="square">
+            <a:spAutoFit/>
+          </a:bodyPr>
+          <a:lstStyle/>
+          <a:p>
+            <a:pPr algn="l">
+              <a:lnSpc>
+                <a:spcPct val="130000"/>
+              </a:lnSpc>
+            </a:pPr>
+            <a:r>
+              <a:rPr sz="1350" b="0" i="0">
+                <a:solidFill>
+                  <a:srgbClr val="1A1A1A"/>
+                </a:solidFill>
+                <a:latin typeface="Sukhumvit Set"/>
+              </a:rPr>
+              <a:t>เอาโมเดล one-step มาเดินต่อ 4 รอบ (preop→3→6→9→12) แล้ววัดผลที่ 12 เดือน</a:t>
+            </a:r>
+          </a:p>
+          <a:p>
+            <a:pPr algn="l">
+              <a:lnSpc>
+                <a:spcPct val="130000"/>
+              </a:lnSpc>
+            </a:pPr>
+            <a:r>
+              <a:rPr sz="1350" b="0" i="0">
+                <a:solidFill>
+                  <a:srgbClr val="1A1A1A"/>
+                </a:solidFill>
+                <a:latin typeface="Sukhumvit Set"/>
+              </a:rPr>
+              <a:t>เทียบกับ ridge ที่ทำนาย preop→12mo ตรง ๆ บนผู้ป่วย 60 คนที่มีข้อมูลครบชุดเดียวกัน</a:t>
+            </a:r>
+          </a:p>
+        </p:txBody>
+      </p:sp>
+      <p:sp>
+        <p:nvSpPr>
+          <p:cNvPr id="6" name="TextBox 5"/>
+          <p:cNvSpPr txBox="1"/>
+          <p:nvPr/>
+        </p:nvSpPr>
+        <p:spPr>
+          <a:xfrm>
+            <a:off x="685800" y="2743200"/>
+            <a:ext cx="3606698" cy="731520"/>
+          </a:xfrm>
+          <a:prstGeom prst="rect">
+            <a:avLst/>
+          </a:prstGeom>
+          <a:noFill/>
+        </p:spPr>
+        <p:txBody>
+          <a:bodyPr wrap="square">
+            <a:spAutoFit/>
+          </a:bodyPr>
+          <a:lstStyle/>
+          <a:p>
+            <a:pPr algn="ctr">
+              <a:lnSpc>
+                <a:spcPct val="100000"/>
+              </a:lnSpc>
+            </a:pPr>
+            <a:r>
+              <a:rPr sz="4000" b="1" i="0">
+                <a:solidFill>
+                  <a:srgbClr val="666666"/>
+                </a:solidFill>
+                <a:latin typeface="Sukhumvit Set"/>
+              </a:rPr>
+              <a:t>0.415</a:t>
+            </a:r>
+          </a:p>
+        </p:txBody>
+      </p:sp>
+      <p:sp>
+        <p:nvSpPr>
+          <p:cNvPr id="7" name="TextBox 6"/>
+          <p:cNvSpPr txBox="1"/>
+          <p:nvPr/>
+        </p:nvSpPr>
+        <p:spPr>
+          <a:xfrm>
+            <a:off x="685800" y="3456432"/>
+            <a:ext cx="3606698" cy="548640"/>
+          </a:xfrm>
+          <a:prstGeom prst="rect">
+            <a:avLst/>
+          </a:prstGeom>
+          <a:noFill/>
+        </p:spPr>
+        <p:txBody>
+          <a:bodyPr wrap="square">
+            <a:spAutoFit/>
+          </a:bodyPr>
+          <a:lstStyle/>
+          <a:p>
+            <a:pPr algn="ctr">
+              <a:lnSpc>
+                <a:spcPct val="100000"/>
+              </a:lnSpc>
+            </a:pPr>
+            <a:r>
+              <a:rPr sz="1100" b="0" i="0">
+                <a:solidFill>
+                  <a:srgbClr val="666666"/>
+                </a:solidFill>
+                <a:latin typeface="Sukhumvit Set"/>
+              </a:rPr>
+              <a:t>persistence</a:t>
+            </a:r>
+          </a:p>
+        </p:txBody>
+      </p:sp>
+      <p:sp>
+        <p:nvSpPr>
+          <p:cNvPr id="8" name="TextBox 7"/>
+          <p:cNvSpPr txBox="1"/>
+          <p:nvPr/>
+        </p:nvSpPr>
+        <p:spPr>
+          <a:xfrm>
+            <a:off x="4292498" y="2743200"/>
+            <a:ext cx="3606698" cy="731520"/>
+          </a:xfrm>
+          <a:prstGeom prst="rect">
+            <a:avLst/>
+          </a:prstGeom>
+          <a:noFill/>
+        </p:spPr>
+        <p:txBody>
+          <a:bodyPr wrap="square">
+            <a:spAutoFit/>
+          </a:bodyPr>
+          <a:lstStyle/>
+          <a:p>
+            <a:pPr algn="ctr">
+              <a:lnSpc>
+                <a:spcPct val="100000"/>
+              </a:lnSpc>
+            </a:pPr>
+            <a:r>
+              <a:rPr sz="4000" b="1" i="0">
+                <a:solidFill>
+                  <a:srgbClr val="B2182B"/>
+                </a:solidFill>
+                <a:latin typeface="Sukhumvit Set"/>
+              </a:rPr>
+              <a:t>0.320</a:t>
+            </a:r>
+          </a:p>
+        </p:txBody>
+      </p:sp>
+      <p:sp>
+        <p:nvSpPr>
+          <p:cNvPr id="9" name="TextBox 8"/>
+          <p:cNvSpPr txBox="1"/>
+          <p:nvPr/>
+        </p:nvSpPr>
+        <p:spPr>
+          <a:xfrm>
+            <a:off x="4292498" y="3456432"/>
+            <a:ext cx="3606698" cy="548640"/>
+          </a:xfrm>
+          <a:prstGeom prst="rect">
+            <a:avLst/>
+          </a:prstGeom>
+          <a:noFill/>
+        </p:spPr>
+        <p:txBody>
+          <a:bodyPr wrap="square">
+            <a:spAutoFit/>
+          </a:bodyPr>
+          <a:lstStyle/>
+          <a:p>
+            <a:pPr algn="ctr">
+              <a:lnSpc>
+                <a:spcPct val="100000"/>
+              </a:lnSpc>
+            </a:pPr>
+            <a:r>
+              <a:rPr sz="1100" b="0" i="0">
+                <a:solidFill>
+                  <a:srgbClr val="666666"/>
+                </a:solidFill>
+                <a:latin typeface="Sukhumvit Set"/>
+              </a:rPr>
+              <a:t>iterated</a:t>
+            </a:r>
+          </a:p>
+          <a:p>
+            <a:pPr algn="ctr">
+              <a:lnSpc>
+                <a:spcPct val="100000"/>
+              </a:lnSpc>
+            </a:pPr>
+            <a:r>
+              <a:rPr sz="1100" b="0" i="0">
+                <a:solidFill>
+                  <a:srgbClr val="666666"/>
+                </a:solidFill>
+                <a:latin typeface="Sukhumvit Set"/>
+              </a:rPr>
+              <a:t>preop→3→6→9→12</a:t>
+            </a:r>
+          </a:p>
+        </p:txBody>
+      </p:sp>
+      <p:sp>
+        <p:nvSpPr>
+          <p:cNvPr id="10" name="TextBox 9"/>
+          <p:cNvSpPr txBox="1"/>
+          <p:nvPr/>
+        </p:nvSpPr>
+        <p:spPr>
+          <a:xfrm>
+            <a:off x="7899196" y="2743200"/>
+            <a:ext cx="3606698" cy="731520"/>
+          </a:xfrm>
+          <a:prstGeom prst="rect">
+            <a:avLst/>
+          </a:prstGeom>
+          <a:noFill/>
+        </p:spPr>
+        <p:txBody>
+          <a:bodyPr wrap="square">
+            <a:spAutoFit/>
+          </a:bodyPr>
+          <a:lstStyle/>
+          <a:p>
+            <a:pPr algn="ctr">
+              <a:lnSpc>
+                <a:spcPct val="100000"/>
+              </a:lnSpc>
+            </a:pPr>
+            <a:r>
+              <a:rPr sz="4000" b="1" i="0">
+                <a:solidFill>
+                  <a:srgbClr val="1F6F8B"/>
+                </a:solidFill>
+                <a:latin typeface="Sukhumvit Set"/>
+              </a:rPr>
+              <a:t>0.299</a:t>
+            </a:r>
+          </a:p>
+        </p:txBody>
+      </p:sp>
+      <p:sp>
+        <p:nvSpPr>
+          <p:cNvPr id="11" name="TextBox 10"/>
+          <p:cNvSpPr txBox="1"/>
+          <p:nvPr/>
+        </p:nvSpPr>
+        <p:spPr>
+          <a:xfrm>
+            <a:off x="7899196" y="3456432"/>
+            <a:ext cx="3606698" cy="548640"/>
+          </a:xfrm>
+          <a:prstGeom prst="rect">
+            <a:avLst/>
+          </a:prstGeom>
+          <a:noFill/>
+        </p:spPr>
+        <p:txBody>
+          <a:bodyPr wrap="square">
+            <a:spAutoFit/>
+          </a:bodyPr>
+          <a:lstStyle/>
+          <a:p>
+            <a:pPr algn="ctr">
+              <a:lnSpc>
+                <a:spcPct val="100000"/>
+              </a:lnSpc>
+            </a:pPr>
+            <a:r>
+              <a:rPr sz="1100" b="0" i="0">
+                <a:solidFill>
+                  <a:srgbClr val="666666"/>
+                </a:solidFill>
+                <a:latin typeface="Sukhumvit Set"/>
+              </a:rPr>
+              <a:t>direct</a:t>
+            </a:r>
+          </a:p>
+          <a:p>
+            <a:pPr algn="ctr">
+              <a:lnSpc>
+                <a:spcPct val="100000"/>
+              </a:lnSpc>
+            </a:pPr>
+            <a:r>
+              <a:rPr sz="1100" b="0" i="0">
+                <a:solidFill>
+                  <a:srgbClr val="666666"/>
+                </a:solidFill>
+                <a:latin typeface="Sukhumvit Set"/>
+              </a:rPr>
+              <a:t>preop→12mo</a:t>
+            </a:r>
+          </a:p>
+        </p:txBody>
+      </p:sp>
+      <p:sp>
+        <p:nvSpPr>
+          <p:cNvPr id="12" name="TextBox 11"/>
+          <p:cNvSpPr txBox="1"/>
+          <p:nvPr/>
+        </p:nvSpPr>
+        <p:spPr>
+          <a:xfrm>
+            <a:off x="685800" y="4480560"/>
+            <a:ext cx="10820095" cy="1645920"/>
+          </a:xfrm>
+          <a:prstGeom prst="rect">
+            <a:avLst/>
+          </a:prstGeom>
+          <a:noFill/>
+        </p:spPr>
+        <p:txBody>
+          <a:bodyPr wrap="square">
+            <a:spAutoFit/>
+          </a:bodyPr>
+          <a:lstStyle/>
+          <a:p>
+            <a:pPr algn="l">
+              <a:lnSpc>
+                <a:spcPct val="135000"/>
+              </a:lnSpc>
+            </a:pPr>
+            <a:r>
+              <a:rPr sz="1400" b="0" i="0">
+                <a:solidFill>
+                  <a:srgbClr val="1A1A1A"/>
+                </a:solidFill>
+                <a:latin typeface="Sukhumvit Set"/>
+              </a:rPr>
+              <a:t>Iterated − direct = +0.021 (95% CI +0.004 ถึง +0.037) — ช่วงความเชื่อมั่นไม่คร่อมศูนย์</a:t>
+            </a:r>
+          </a:p>
+          <a:p>
+            <a:pPr algn="l">
+              <a:lnSpc>
+                <a:spcPct val="135000"/>
+              </a:lnSpc>
+            </a:pPr>
+            <a:r>
+              <a:rPr sz="1400" b="0" i="0">
+                <a:solidFill>
+                  <a:srgbClr val="1A1A1A"/>
+                </a:solidFill>
+                <a:latin typeface="Sukhumvit Set"/>
+              </a:rPr>
+              <a:t>ความคลาดเคลื่อนสะสมทบกัน 4 ชั้น และการ shrink ในแต่ละก้าวก็ดึงคำทำนายเข้าหาค่าเฉลี่ยมากขึ้นเรื่อย ๆ</a:t>
+            </a:r>
+          </a:p>
+          <a:p>
+            <a:pPr algn="l">
+              <a:lnSpc>
+                <a:spcPct val="135000"/>
+              </a:lnSpc>
+            </a:pPr>
+            <a:r>
+              <a:rPr sz="1400" b="0" i="0">
+                <a:solidFill>
+                  <a:srgbClr val="1A1A1A"/>
+                </a:solidFill>
+                <a:latin typeface="Sukhumvit Set"/>
+              </a:rPr>
+              <a:t/>
+            </a:r>
+          </a:p>
+          <a:p>
+            <a:pPr algn="l">
+              <a:lnSpc>
+                <a:spcPct val="135000"/>
+              </a:lnSpc>
+            </a:pPr>
+            <a:r>
+              <a:rPr sz="1400" b="0" i="0">
+                <a:solidFill>
+                  <a:srgbClr val="1A1A1A"/>
+                </a:solidFill>
+                <a:latin typeface="Sukhumvit Set"/>
+              </a:rPr>
+              <a:t>ถ้าต้องการโปรไฟล์ที่ 12 เดือน ให้ทำนายตรง ๆ ไปเลย</a:t>
+            </a:r>
+          </a:p>
+        </p:txBody>
+      </p:sp>
+    </p:spTree>
+  </p:cSld>
+  <p:clrMapOvr>
+    <a:masterClrMapping/>
+  </p:clrMapOvr>
+</p:sld>
+</file>
+
+<file path=ppt/slides/slide15.xml><?xml version="1.0" encoding="utf-8"?>
+<p:sld xmlns:a="http://schemas.openxmlformats.org/drawingml/2006/main" xmlns:p="http://schemas.openxmlformats.org/presentationml/2006/main" xmlns:r="http://schemas.openxmlformats.org/officeDocument/2006/relationships">
+  <p:cSld>
+    <p:spTree>
+      <p:nvGrpSpPr>
+        <p:cNvPr id="1" name=""/>
+        <p:cNvGrpSpPr/>
+        <p:nvPr/>
+      </p:nvGrpSpPr>
+      <p:grpSpPr/>
+      <p:sp>
+        <p:nvSpPr>
+          <p:cNvPr id="2" name="TextBox 1"/>
+          <p:cNvSpPr txBox="1"/>
+          <p:nvPr/>
+        </p:nvSpPr>
+        <p:spPr>
+          <a:xfrm>
+            <a:off x="685800" y="384048"/>
+            <a:ext cx="10820095" cy="274320"/>
+          </a:xfrm>
+          <a:prstGeom prst="rect">
+            <a:avLst/>
+          </a:prstGeom>
+          <a:noFill/>
+        </p:spPr>
+        <p:txBody>
+          <a:bodyPr wrap="square">
+            <a:spAutoFit/>
+          </a:bodyPr>
+          <a:lstStyle/>
+          <a:p>
+            <a:pPr algn="l">
+              <a:lnSpc>
+                <a:spcPct val="100000"/>
+              </a:lnSpc>
+            </a:pPr>
+            <a:r>
+              <a:rPr sz="1100" b="1" i="0">
+                <a:solidFill>
+                  <a:srgbClr val="666666"/>
+                </a:solidFill>
+                <a:latin typeface="Sukhumvit Set"/>
+              </a:rPr>
+              <a:t>สิ่งที่นำไปใช้ต่อได้</a:t>
+            </a:r>
+          </a:p>
+        </p:txBody>
+      </p:sp>
+      <p:sp>
+        <p:nvSpPr>
+          <p:cNvPr id="3" name="TextBox 2"/>
+          <p:cNvSpPr txBox="1"/>
+          <p:nvPr/>
+        </p:nvSpPr>
+        <p:spPr>
+          <a:xfrm>
+            <a:off x="685800" y="658368"/>
+            <a:ext cx="10820095" cy="822960"/>
+          </a:xfrm>
+          <a:prstGeom prst="rect">
+            <a:avLst/>
+          </a:prstGeom>
+          <a:noFill/>
+        </p:spPr>
+        <p:txBody>
+          <a:bodyPr wrap="square">
+            <a:spAutoFit/>
+          </a:bodyPr>
+          <a:lstStyle/>
+          <a:p>
+            <a:pPr algn="l">
+              <a:lnSpc>
+                <a:spcPct val="100000"/>
+              </a:lnSpc>
+            </a:pPr>
+            <a:r>
+              <a:rPr sz="2700" b="1" i="0">
+                <a:solidFill>
+                  <a:srgbClr val="1A1A1A"/>
+                </a:solidFill>
+                <a:latin typeface="Sukhumvit Set"/>
+              </a:rPr>
+              <a:t>ตัวควบคุมที่นำไปใช้ซ้ำได้</a:t>
+            </a:r>
+          </a:p>
+        </p:txBody>
+      </p:sp>
+      <p:sp>
+        <p:nvSpPr>
+          <p:cNvPr id="4" name="Rectangle 3"/>
+          <p:cNvSpPr/>
+          <p:nvPr/>
+        </p:nvSpPr>
+        <p:spPr>
+          <a:xfrm>
+            <a:off x="685800" y="1481328"/>
+            <a:ext cx="10820095" cy="9525"/>
+          </a:xfrm>
+          <a:prstGeom prst="rect">
+            <a:avLst/>
+          </a:prstGeom>
+          <a:solidFill>
+            <a:srgbClr val="DDDDDD"/>
+          </a:solidFill>
+          <a:ln>
+            <a:noFill/>
+          </a:ln>
+          <a:effectLst/>
+        </p:spPr>
+        <p:style>
+          <a:lnRef idx="1">
+            <a:schemeClr val="accent1"/>
+          </a:lnRef>
+          <a:fillRef idx="3">
+            <a:schemeClr val="accent1"/>
+          </a:fillRef>
+          <a:effectRef idx="2">
+            <a:schemeClr val="accent1"/>
+          </a:effectRef>
+          <a:fontRef idx="minor">
+            <a:schemeClr val="lt1"/>
+          </a:fontRef>
+        </p:style>
+        <p:txBody>
+          <a:bodyPr rtlCol="0" anchor="ctr"/>
+          <a:lstStyle/>
+          <a:p>
+            <a:pPr algn="ctr"/>
+          </a:p>
+        </p:txBody>
+      </p:sp>
+      <p:sp>
+        <p:nvSpPr>
+          <p:cNvPr id="5" name="TextBox 4"/>
+          <p:cNvSpPr txBox="1"/>
+          <p:nvPr/>
+        </p:nvSpPr>
+        <p:spPr>
+          <a:xfrm>
+            <a:off x="685800" y="1828800"/>
+            <a:ext cx="3017520" cy="365760"/>
+          </a:xfrm>
+          <a:prstGeom prst="rect">
+            <a:avLst/>
+          </a:prstGeom>
+          <a:noFill/>
+        </p:spPr>
+        <p:txBody>
+          <a:bodyPr wrap="square">
+            <a:spAutoFit/>
+          </a:bodyPr>
+          <a:lstStyle/>
+          <a:p>
+            <a:pPr algn="l">
+              <a:lnSpc>
+                <a:spcPct val="100000"/>
+              </a:lnSpc>
+            </a:pPr>
+            <a:r>
+              <a:rPr sz="1450" b="1" i="0">
+                <a:solidFill>
+                  <a:srgbClr val="1F6F8B"/>
+                </a:solidFill>
+                <a:latin typeface="Sukhumvit Set"/>
+              </a:rPr>
+              <a:t>ตัวให้คะแนนแบบไม่เรียนรู้</a:t>
+            </a:r>
+          </a:p>
+        </p:txBody>
+      </p:sp>
+      <p:sp>
+        <p:nvSpPr>
+          <p:cNvPr id="6" name="TextBox 5"/>
+          <p:cNvSpPr txBox="1"/>
+          <p:nvPr/>
+        </p:nvSpPr>
+        <p:spPr>
+          <a:xfrm>
+            <a:off x="3886200" y="1828800"/>
+            <a:ext cx="7619695" cy="731520"/>
+          </a:xfrm>
+          <a:prstGeom prst="rect">
+            <a:avLst/>
+          </a:prstGeom>
+          <a:noFill/>
+        </p:spPr>
+        <p:txBody>
+          <a:bodyPr wrap="square">
+            <a:spAutoFit/>
+          </a:bodyPr>
+          <a:lstStyle/>
+          <a:p>
+            <a:pPr algn="l">
+              <a:lnSpc>
+                <a:spcPct val="125000"/>
+              </a:lnSpc>
+            </a:pPr>
+            <a:r>
+              <a:rPr sz="1200" b="0" i="0">
+                <a:solidFill>
+                  <a:srgbClr val="1A1A1A"/>
+                </a:solidFill>
+                <a:latin typeface="Sukhumvit Set"/>
+              </a:rPr>
+              <a:t>ผลรวมของ z-score ค่าตั้งต้นแบบใส่เครื่องหมาย ใช้จับโมเดลที่ยังไม่ลู่เข้า หรือที่ไม่ได้เรียนรู้อะไรเกินกว่าที่ input บอกอยู่แล้ว โมเดลทุกตัวต้องรายงานคู่กับค่านี้เสมอ</a:t>
+            </a:r>
+          </a:p>
+        </p:txBody>
+      </p:sp>
+      <p:sp>
+        <p:nvSpPr>
+          <p:cNvPr id="7" name="TextBox 6"/>
+          <p:cNvSpPr txBox="1"/>
+          <p:nvPr/>
+        </p:nvSpPr>
+        <p:spPr>
+          <a:xfrm>
+            <a:off x="685800" y="2834640"/>
+            <a:ext cx="3017520" cy="365760"/>
+          </a:xfrm>
+          <a:prstGeom prst="rect">
+            <a:avLst/>
+          </a:prstGeom>
+          <a:noFill/>
+        </p:spPr>
+        <p:txBody>
+          <a:bodyPr wrap="square">
+            <a:spAutoFit/>
+          </a:bodyPr>
+          <a:lstStyle/>
+          <a:p>
+            <a:pPr algn="l">
+              <a:lnSpc>
+                <a:spcPct val="100000"/>
+              </a:lnSpc>
+            </a:pPr>
+            <a:r>
+              <a:rPr sz="1450" b="1" i="0">
+                <a:solidFill>
+                  <a:srgbClr val="1F6F8B"/>
+                </a:solidFill>
+                <a:latin typeface="Sukhumvit Set"/>
+              </a:rPr>
+              <a:t>null แบบทำลายการจับคู่</a:t>
+            </a:r>
+          </a:p>
+        </p:txBody>
+      </p:sp>
+      <p:sp>
+        <p:nvSpPr>
+          <p:cNvPr id="8" name="TextBox 7"/>
+          <p:cNvSpPr txBox="1"/>
+          <p:nvPr/>
+        </p:nvSpPr>
+        <p:spPr>
+          <a:xfrm>
+            <a:off x="3886200" y="2834640"/>
+            <a:ext cx="7619695" cy="731520"/>
+          </a:xfrm>
+          <a:prstGeom prst="rect">
+            <a:avLst/>
+          </a:prstGeom>
+          <a:noFill/>
+        </p:spPr>
+        <p:txBody>
+          <a:bodyPr wrap="square">
+            <a:spAutoFit/>
+          </a:bodyPr>
+          <a:lstStyle/>
+          <a:p>
+            <a:pPr algn="l">
+              <a:lnSpc>
+                <a:spcPct val="125000"/>
+              </a:lnSpc>
+            </a:pPr>
+            <a:r>
+              <a:rPr sz="1200" b="0" i="0">
+                <a:solidFill>
+                  <a:srgbClr val="1A1A1A"/>
+                </a:solidFill>
+                <a:latin typeface="Sukhumvit Set"/>
+              </a:rPr>
+              <a:t>สลับว่าอนาคตของใครเป็นของผู้ป่วยคนไหน แล้วสร้าง outcome ขึ้นใหม่ ใช้จับ outcome ที่ถูกสร้างขึ้นมาจาก feature เอง ตัวนี้คือตัวที่ชี้ขาด</a:t>
+            </a:r>
+          </a:p>
+        </p:txBody>
+      </p:sp>
+      <p:sp>
+        <p:nvSpPr>
+          <p:cNvPr id="9" name="TextBox 8"/>
+          <p:cNvSpPr txBox="1"/>
+          <p:nvPr/>
+        </p:nvSpPr>
+        <p:spPr>
+          <a:xfrm>
+            <a:off x="685800" y="3840480"/>
+            <a:ext cx="3017520" cy="365760"/>
+          </a:xfrm>
+          <a:prstGeom prst="rect">
+            <a:avLst/>
+          </a:prstGeom>
+          <a:noFill/>
+        </p:spPr>
+        <p:txBody>
+          <a:bodyPr wrap="square">
+            <a:spAutoFit/>
+          </a:bodyPr>
+          <a:lstStyle/>
+          <a:p>
+            <a:pPr algn="l">
+              <a:lnSpc>
+                <a:spcPct val="100000"/>
+              </a:lnSpc>
+            </a:pPr>
+            <a:r>
+              <a:rPr sz="1450" b="1" i="0">
+                <a:solidFill>
+                  <a:srgbClr val="1F6F8B"/>
+                </a:solidFill>
+                <a:latin typeface="Sukhumvit Set"/>
+              </a:rPr>
+              <a:t>การทดสอบ label-permutation</a:t>
+            </a:r>
+          </a:p>
+        </p:txBody>
+      </p:sp>
+      <p:sp>
+        <p:nvSpPr>
+          <p:cNvPr id="10" name="TextBox 9"/>
+          <p:cNvSpPr txBox="1"/>
+          <p:nvPr/>
+        </p:nvSpPr>
+        <p:spPr>
+          <a:xfrm>
+            <a:off x="3886200" y="3840480"/>
+            <a:ext cx="7619695" cy="731520"/>
+          </a:xfrm>
+          <a:prstGeom prst="rect">
+            <a:avLst/>
+          </a:prstGeom>
+          <a:noFill/>
+        </p:spPr>
+        <p:txBody>
+          <a:bodyPr wrap="square">
+            <a:spAutoFit/>
+          </a:bodyPr>
+          <a:lstStyle/>
+          <a:p>
+            <a:pPr algn="l">
+              <a:lnSpc>
+                <a:spcPct val="125000"/>
+              </a:lnSpc>
+            </a:pPr>
+            <a:r>
+              <a:rPr sz="1200" b="0" i="0">
+                <a:solidFill>
+                  <a:srgbClr val="1A1A1A"/>
+                </a:solidFill>
+                <a:latin typeface="Sukhumvit Set"/>
+              </a:rPr>
+              <a:t>จำเป็น แต่พิสูจน์แล้วว่าไม่เพียงพอ — ให้ค่า p = 0.002 กับการตั้งโจทย์ที่ผิด</a:t>
+            </a:r>
+          </a:p>
+        </p:txBody>
+      </p:sp>
+      <p:sp>
+        <p:nvSpPr>
+          <p:cNvPr id="11" name="TextBox 10"/>
+          <p:cNvSpPr txBox="1"/>
+          <p:nvPr/>
+        </p:nvSpPr>
+        <p:spPr>
+          <a:xfrm>
+            <a:off x="685800" y="4846320"/>
+            <a:ext cx="3017520" cy="365760"/>
+          </a:xfrm>
+          <a:prstGeom prst="rect">
+            <a:avLst/>
+          </a:prstGeom>
+          <a:noFill/>
+        </p:spPr>
+        <p:txBody>
+          <a:bodyPr wrap="square">
+            <a:spAutoFit/>
+          </a:bodyPr>
+          <a:lstStyle/>
+          <a:p>
+            <a:pPr algn="l">
+              <a:lnSpc>
+                <a:spcPct val="100000"/>
+              </a:lnSpc>
+            </a:pPr>
+            <a:r>
+              <a:rPr sz="1450" b="1" i="0">
+                <a:solidFill>
+                  <a:srgbClr val="1F6F8B"/>
+                </a:solidFill>
+                <a:latin typeface="Sukhumvit Set"/>
+              </a:rPr>
+              <a:t>ช่วงความเชื่อมั่นแบบ paired bootstrap</a:t>
+            </a:r>
+          </a:p>
+        </p:txBody>
+      </p:sp>
+      <p:sp>
+        <p:nvSpPr>
+          <p:cNvPr id="12" name="TextBox 11"/>
+          <p:cNvSpPr txBox="1"/>
+          <p:nvPr/>
+        </p:nvSpPr>
+        <p:spPr>
+          <a:xfrm>
+            <a:off x="3886200" y="4846320"/>
+            <a:ext cx="7619695" cy="731520"/>
+          </a:xfrm>
+          <a:prstGeom prst="rect">
+            <a:avLst/>
+          </a:prstGeom>
+          <a:noFill/>
+        </p:spPr>
+        <p:txBody>
+          <a:bodyPr wrap="square">
+            <a:spAutoFit/>
+          </a:bodyPr>
+          <a:lstStyle/>
+          <a:p>
+            <a:pPr algn="l">
+              <a:lnSpc>
+                <a:spcPct val="125000"/>
+              </a:lnSpc>
+            </a:pPr>
+            <a:r>
+              <a:rPr sz="1200" b="0" i="0">
+                <a:solidFill>
+                  <a:srgbClr val="1A1A1A"/>
+                </a:solidFill>
+                <a:latin typeface="Sukhumvit Set"/>
+              </a:rPr>
+              <a:t>ใช้กับทุกส่วนต่างระหว่างโมเดลกับ baseline โดยสุ่มผู้ป่วยพร้อมกันเป็นคู่ ส่วนต่าง 2.4% ที่ไม่มีช่วงความเชื่อมั่นกำกับ ยังไม่นับเป็นผลลัพธ์</a:t>
+            </a:r>
+          </a:p>
+        </p:txBody>
+      </p:sp>
+      <p:sp>
+        <p:nvSpPr>
+          <p:cNvPr id="13" name="Rectangle 12"/>
+          <p:cNvSpPr/>
+          <p:nvPr/>
+        </p:nvSpPr>
+        <p:spPr>
+          <a:xfrm>
+            <a:off x="685800" y="5943600"/>
+            <a:ext cx="10820095" cy="9525"/>
+          </a:xfrm>
+          <a:prstGeom prst="rect">
+            <a:avLst/>
+          </a:prstGeom>
+          <a:solidFill>
+            <a:srgbClr val="DDDDDD"/>
+          </a:solidFill>
+          <a:ln>
+            <a:noFill/>
+          </a:ln>
+          <a:effectLst/>
+        </p:spPr>
+        <p:style>
+          <a:lnRef idx="1">
+            <a:schemeClr val="accent1"/>
+          </a:lnRef>
+          <a:fillRef idx="3">
+            <a:schemeClr val="accent1"/>
+          </a:fillRef>
+          <a:effectRef idx="2">
+            <a:schemeClr val="accent1"/>
+          </a:effectRef>
+          <a:fontRef idx="minor">
+            <a:schemeClr val="lt1"/>
+          </a:fontRef>
+        </p:style>
+        <p:txBody>
+          <a:bodyPr rtlCol="0" anchor="ctr"/>
+          <a:lstStyle/>
+          <a:p>
+            <a:pPr algn="ctr"/>
+          </a:p>
+        </p:txBody>
+      </p:sp>
+      <p:sp>
+        <p:nvSpPr>
+          <p:cNvPr id="14" name="TextBox 13"/>
+          <p:cNvSpPr txBox="1"/>
+          <p:nvPr/>
+        </p:nvSpPr>
+        <p:spPr>
+          <a:xfrm>
+            <a:off x="685800" y="6126480"/>
+            <a:ext cx="10820095" cy="457200"/>
+          </a:xfrm>
+          <a:prstGeom prst="rect">
+            <a:avLst/>
+          </a:prstGeom>
+          <a:noFill/>
+        </p:spPr>
+        <p:txBody>
+          <a:bodyPr wrap="square">
+            <a:spAutoFit/>
+          </a:bodyPr>
+          <a:lstStyle/>
+          <a:p>
+            <a:pPr algn="l">
+              <a:lnSpc>
+                <a:spcPct val="100000"/>
+              </a:lnSpc>
+            </a:pPr>
+            <a:r>
+              <a:rPr sz="1250" b="1" i="0">
+                <a:solidFill>
+                  <a:srgbClr val="1A1A1A"/>
+                </a:solidFill>
+                <a:latin typeface="Sukhumvit Set"/>
+              </a:rPr>
+              <a:t>ควรใช้ null แบบทำลายการจับคู่ กับงานวิเคราะห์ข้อมูลระยะยาวทุกชิ้นที่ outcome เป็นค่าผลต่าง และค่าตั้งต้นก็เป็น feature ด้วย</a:t>
+            </a:r>
+          </a:p>
+        </p:txBody>
+      </p:sp>
+    </p:spTree>
+  </p:cSld>
+  <p:clrMapOvr>
+    <a:masterClrMapping/>
+  </p:clrMapOvr>
+</p:sld>
+</file>
+
+<file path=ppt/slides/slide16.xml><?xml version="1.0" encoding="utf-8"?>
 <p:sld xmlns:a="http://schemas.openxmlformats.org/drawingml/2006/main" xmlns:p="http://schemas.openxmlformats.org/presentationml/2006/main" xmlns:r="http://schemas.openxmlformats.org/officeDocument/2006/relationships">
   <p:cSld>
     <p:spTree>
